--- a/knowledge/自動車アフターマーケット・部品卸/イエローハット_資料/Phase2_3_イメージ.pptx
+++ b/knowledge/自動車アフターマーケット・部品卸/イエローハット_資料/Phase2_3_イメージ.pptx
@@ -3105,8 +3105,8 @@
         </p:blipFill>
         <p:spPr>
           <a:xfrm>
-            <a:off x="415137" y="182880"/>
-            <a:ext cx="11361420" cy="6492240"/>
+            <a:off x="294271" y="182880"/>
+            <a:ext cx="11603152" cy="6492240"/>
           </a:xfrm>
           <a:prstGeom prst="rect">
             <a:avLst/>

--- a/knowledge/自動車アフターマーケット・部品卸/イエローハット_資料/Phase2_3_イメージ.pptx
+++ b/knowledge/自動車アフターマーケット・部品卸/イエローハット_資料/Phase2_3_イメージ.pptx
@@ -3105,8 +3105,8 @@
         </p:blipFill>
         <p:spPr>
           <a:xfrm>
-            <a:off x="294271" y="182880"/>
-            <a:ext cx="11603152" cy="6492240"/>
+            <a:off x="406247" y="228600"/>
+            <a:ext cx="11379200" cy="6400800"/>
           </a:xfrm>
           <a:prstGeom prst="rect">
             <a:avLst/>
@@ -3147,8 +3147,8 @@
         </p:blipFill>
         <p:spPr>
           <a:xfrm>
-            <a:off x="642366" y="182880"/>
-            <a:ext cx="10906963" cy="6492240"/>
+            <a:off x="406247" y="228600"/>
+            <a:ext cx="11379200" cy="6400800"/>
           </a:xfrm>
           <a:prstGeom prst="rect">
             <a:avLst/>
